--- a/docs/presentation.pptx
+++ b/docs/presentation.pptx
@@ -2031,7 +2031,7 @@
                 <a:ea typeface="Malgun Gothic" pitchFamily="34" charset="-122"/>
                 <a:cs typeface="Malgun Gothic" pitchFamily="34" charset="-120"/>
               </a:rPr>
-              <a:t>팀명 ______ · 팀원 3인 (기획/UX · 개발 · 검증/문서)</a:t>
+              <a:t>팀원 3인 · 김다빈(기획/UX) · 김진아(개발) · 이승민(검증/문서)</a:t>
             </a:r>
             <a:endParaRPr lang="en-US" sz="1200" dirty="0"/>
           </a:p>
@@ -5057,7 +5057,7 @@
                 <a:ea typeface="Malgun Gothic" pitchFamily="34" charset="-122"/>
                 <a:cs typeface="Malgun Gothic" pitchFamily="34" charset="-120"/>
               </a:rPr>
-              <a:t>______</a:t>
+              <a:t>김다빈</a:t>
             </a:r>
             <a:endParaRPr lang="en-US" sz="1200" dirty="0"/>
           </a:p>
@@ -5201,7 +5201,7 @@
                 <a:ea typeface="Malgun Gothic" pitchFamily="34" charset="-122"/>
                 <a:cs typeface="Malgun Gothic" pitchFamily="34" charset="-120"/>
               </a:rPr>
-              <a:t>______</a:t>
+              <a:t>김진아</a:t>
             </a:r>
             <a:endParaRPr lang="en-US" sz="1200" dirty="0"/>
           </a:p>
@@ -5345,7 +5345,7 @@
                 <a:ea typeface="Malgun Gothic" pitchFamily="34" charset="-122"/>
                 <a:cs typeface="Malgun Gothic" pitchFamily="34" charset="-120"/>
               </a:rPr>
-              <a:t>______</a:t>
+              <a:t>이승민</a:t>
             </a:r>
             <a:endParaRPr lang="en-US" sz="1200" dirty="0"/>
           </a:p>
